--- a/module-01-driving/slides/06-differential-drive.pptx
+++ b/module-01-driving/slides/06-differential-drive.pptx
@@ -5,20 +5,20 @@
     <p:sldMasterId id="2147483648" r:id="rId1"/>
   </p:sldMasterIdLst>
   <p:sldIdLst>
-    <p:sldId id="256" r:id="rId7"/>
-    <p:sldId id="257" r:id="rId8"/>
-    <p:sldId id="258" r:id="rId9"/>
-    <p:sldId id="259" r:id="rId10"/>
-    <p:sldId id="260" r:id="rId11"/>
-    <p:sldId id="261" r:id="rId12"/>
-    <p:sldId id="262" r:id="rId13"/>
-    <p:sldId id="263" r:id="rId14"/>
-    <p:sldId id="264" r:id="rId15"/>
-    <p:sldId id="265" r:id="rId16"/>
-    <p:sldId id="266" r:id="rId17"/>
-    <p:sldId id="267" r:id="rId18"/>
+    <p:sldId id="256" r:id="rId2"/>
+    <p:sldId id="257" r:id="rId3"/>
+    <p:sldId id="258" r:id="rId4"/>
+    <p:sldId id="259" r:id="rId5"/>
+    <p:sldId id="260" r:id="rId6"/>
+    <p:sldId id="261" r:id="rId7"/>
+    <p:sldId id="262" r:id="rId8"/>
+    <p:sldId id="263" r:id="rId9"/>
+    <p:sldId id="264" r:id="rId10"/>
+    <p:sldId id="265" r:id="rId11"/>
+    <p:sldId id="266" r:id="rId12"/>
+    <p:sldId id="267" r:id="rId13"/>
   </p:sldIdLst>
-  <p:sldSz cx="12191695" cy="6858000" type="screen4x3"/>
+  <p:sldSz cx="12192000" cy="6858000"/>
   <p:notesSz cx="6858000" cy="9144000"/>
   <p:defaultTextStyle>
     <a:defPPr>
@@ -115,6 +115,22 @@
       </a:defRPr>
     </a:lvl9pPr>
   </p:defaultTextStyle>
+  <p:extLst>
+    <p:ext uri="{EFAFB233-063F-42B5-8137-9DF3F51BA10A}">
+      <p15:sldGuideLst xmlns:p15="http://schemas.microsoft.com/office/powerpoint/2012/main">
+        <p15:guide id="1" orient="horz" pos="2160">
+          <p15:clr>
+            <a:srgbClr val="A4A3A4"/>
+          </p15:clr>
+        </p15:guide>
+        <p15:guide id="2" pos="2880">
+          <p15:clr>
+            <a:srgbClr val="A4A3A4"/>
+          </p15:clr>
+        </p15:guide>
+      </p15:sldGuideLst>
+    </p:ext>
+  </p:extLst>
 </p:presentation>
 </file>
 
@@ -156,10 +172,9 @@
           <a:lstStyle/>
           <a:p>
             <a:r>
-              <a:rPr lang="en-US" smtClean="0"/>
+              <a:rPr lang="en-US"/>
               <a:t>Click to edit Master title style</a:t>
             </a:r>
-            <a:endParaRPr lang="en-US"/>
           </a:p>
         </p:txBody>
       </p:sp>
@@ -275,10 +290,9 @@
           </a:lstStyle>
           <a:p>
             <a:r>
-              <a:rPr lang="en-US" smtClean="0"/>
+              <a:rPr lang="en-US"/>
               <a:t>Click to edit Master subtitle style</a:t>
             </a:r>
-            <a:endParaRPr lang="en-US"/>
           </a:p>
         </p:txBody>
       </p:sp>
@@ -299,7 +313,7 @@
           <a:p>
             <a:fld id="{5BCAD085-E8A6-8845-BD4E-CB4CCA059FC4}" type="datetimeFigureOut">
               <a:rPr lang="en-US" smtClean="0"/>
-              <a:t>1/27/13</a:t>
+              <a:t>9/9/26</a:t>
             </a:fld>
             <a:endParaRPr lang="en-US"/>
           </a:p>
@@ -393,10 +407,9 @@
           <a:lstStyle/>
           <a:p>
             <a:r>
-              <a:rPr lang="en-US" smtClean="0"/>
+              <a:rPr lang="en-US"/>
               <a:t>Click to edit Master title style</a:t>
             </a:r>
-            <a:endParaRPr lang="en-US"/>
           </a:p>
         </p:txBody>
       </p:sp>
@@ -417,38 +430,37 @@
           <a:p>
             <a:pPr lvl="0"/>
             <a:r>
-              <a:rPr lang="en-US" smtClean="0"/>
+              <a:rPr lang="en-US"/>
               <a:t>Click to edit Master text styles</a:t>
             </a:r>
           </a:p>
           <a:p>
             <a:pPr lvl="1"/>
             <a:r>
-              <a:rPr lang="en-US" smtClean="0"/>
+              <a:rPr lang="en-US"/>
               <a:t>Second level</a:t>
             </a:r>
           </a:p>
           <a:p>
             <a:pPr lvl="2"/>
             <a:r>
-              <a:rPr lang="en-US" smtClean="0"/>
+              <a:rPr lang="en-US"/>
               <a:t>Third level</a:t>
             </a:r>
           </a:p>
           <a:p>
             <a:pPr lvl="3"/>
             <a:r>
-              <a:rPr lang="en-US" smtClean="0"/>
+              <a:rPr lang="en-US"/>
               <a:t>Fourth level</a:t>
             </a:r>
           </a:p>
           <a:p>
             <a:pPr lvl="4"/>
             <a:r>
-              <a:rPr lang="en-US" smtClean="0"/>
+              <a:rPr lang="en-US"/>
               <a:t>Fifth level</a:t>
             </a:r>
-            <a:endParaRPr lang="en-US"/>
           </a:p>
         </p:txBody>
       </p:sp>
@@ -469,7 +481,7 @@
           <a:p>
             <a:fld id="{5BCAD085-E8A6-8845-BD4E-CB4CCA059FC4}" type="datetimeFigureOut">
               <a:rPr lang="en-US" smtClean="0"/>
-              <a:t>1/27/13</a:t>
+              <a:t>9/9/26</a:t>
             </a:fld>
             <a:endParaRPr lang="en-US"/>
           </a:p>
@@ -568,10 +580,9 @@
           <a:lstStyle/>
           <a:p>
             <a:r>
-              <a:rPr lang="en-US" smtClean="0"/>
+              <a:rPr lang="en-US"/>
               <a:t>Click to edit Master title style</a:t>
             </a:r>
-            <a:endParaRPr lang="en-US"/>
           </a:p>
         </p:txBody>
       </p:sp>
@@ -597,38 +608,37 @@
           <a:p>
             <a:pPr lvl="0"/>
             <a:r>
-              <a:rPr lang="en-US" smtClean="0"/>
+              <a:rPr lang="en-US"/>
               <a:t>Click to edit Master text styles</a:t>
             </a:r>
           </a:p>
           <a:p>
             <a:pPr lvl="1"/>
             <a:r>
-              <a:rPr lang="en-US" smtClean="0"/>
+              <a:rPr lang="en-US"/>
               <a:t>Second level</a:t>
             </a:r>
           </a:p>
           <a:p>
             <a:pPr lvl="2"/>
             <a:r>
-              <a:rPr lang="en-US" smtClean="0"/>
+              <a:rPr lang="en-US"/>
               <a:t>Third level</a:t>
             </a:r>
           </a:p>
           <a:p>
             <a:pPr lvl="3"/>
             <a:r>
-              <a:rPr lang="en-US" smtClean="0"/>
+              <a:rPr lang="en-US"/>
               <a:t>Fourth level</a:t>
             </a:r>
           </a:p>
           <a:p>
             <a:pPr lvl="4"/>
             <a:r>
-              <a:rPr lang="en-US" smtClean="0"/>
+              <a:rPr lang="en-US"/>
               <a:t>Fifth level</a:t>
             </a:r>
-            <a:endParaRPr lang="en-US"/>
           </a:p>
         </p:txBody>
       </p:sp>
@@ -649,7 +659,7 @@
           <a:p>
             <a:fld id="{5BCAD085-E8A6-8845-BD4E-CB4CCA059FC4}" type="datetimeFigureOut">
               <a:rPr lang="en-US" smtClean="0"/>
-              <a:t>1/27/13</a:t>
+              <a:t>9/9/26</a:t>
             </a:fld>
             <a:endParaRPr lang="en-US"/>
           </a:p>
@@ -743,10 +753,9 @@
           <a:lstStyle/>
           <a:p>
             <a:r>
-              <a:rPr lang="en-US" smtClean="0"/>
+              <a:rPr lang="en-US"/>
               <a:t>Click to edit Master title style</a:t>
             </a:r>
-            <a:endParaRPr lang="en-US"/>
           </a:p>
         </p:txBody>
       </p:sp>
@@ -767,38 +776,37 @@
           <a:p>
             <a:pPr lvl="0"/>
             <a:r>
-              <a:rPr lang="en-US" smtClean="0"/>
+              <a:rPr lang="en-US"/>
               <a:t>Click to edit Master text styles</a:t>
             </a:r>
           </a:p>
           <a:p>
             <a:pPr lvl="1"/>
             <a:r>
-              <a:rPr lang="en-US" smtClean="0"/>
+              <a:rPr lang="en-US"/>
               <a:t>Second level</a:t>
             </a:r>
           </a:p>
           <a:p>
             <a:pPr lvl="2"/>
             <a:r>
-              <a:rPr lang="en-US" smtClean="0"/>
+              <a:rPr lang="en-US"/>
               <a:t>Third level</a:t>
             </a:r>
           </a:p>
           <a:p>
             <a:pPr lvl="3"/>
             <a:r>
-              <a:rPr lang="en-US" smtClean="0"/>
+              <a:rPr lang="en-US"/>
               <a:t>Fourth level</a:t>
             </a:r>
           </a:p>
           <a:p>
             <a:pPr lvl="4"/>
             <a:r>
-              <a:rPr lang="en-US" smtClean="0"/>
+              <a:rPr lang="en-US"/>
               <a:t>Fifth level</a:t>
             </a:r>
-            <a:endParaRPr lang="en-US"/>
           </a:p>
         </p:txBody>
       </p:sp>
@@ -819,7 +827,7 @@
           <a:p>
             <a:fld id="{5BCAD085-E8A6-8845-BD4E-CB4CCA059FC4}" type="datetimeFigureOut">
               <a:rPr lang="en-US" smtClean="0"/>
-              <a:t>1/27/13</a:t>
+              <a:t>9/9/26</a:t>
             </a:fld>
             <a:endParaRPr lang="en-US"/>
           </a:p>
@@ -922,10 +930,9 @@
           </a:lstStyle>
           <a:p>
             <a:r>
-              <a:rPr lang="en-US" smtClean="0"/>
+              <a:rPr lang="en-US"/>
               <a:t>Click to edit Master title style</a:t>
             </a:r>
-            <a:endParaRPr lang="en-US"/>
           </a:p>
         </p:txBody>
       </p:sp>
@@ -1042,7 +1049,7 @@
           <a:p>
             <a:pPr lvl="0"/>
             <a:r>
-              <a:rPr lang="en-US" smtClean="0"/>
+              <a:rPr lang="en-US"/>
               <a:t>Click to edit Master text styles</a:t>
             </a:r>
           </a:p>
@@ -1065,7 +1072,7 @@
           <a:p>
             <a:fld id="{5BCAD085-E8A6-8845-BD4E-CB4CCA059FC4}" type="datetimeFigureOut">
               <a:rPr lang="en-US" smtClean="0"/>
-              <a:t>1/27/13</a:t>
+              <a:t>9/9/26</a:t>
             </a:fld>
             <a:endParaRPr lang="en-US"/>
           </a:p>
@@ -1159,10 +1166,9 @@
           <a:lstStyle/>
           <a:p>
             <a:r>
-              <a:rPr lang="en-US" smtClean="0"/>
+              <a:rPr lang="en-US"/>
               <a:t>Click to edit Master title style</a:t>
             </a:r>
-            <a:endParaRPr lang="en-US"/>
           </a:p>
         </p:txBody>
       </p:sp>
@@ -1216,38 +1222,37 @@
           <a:p>
             <a:pPr lvl="0"/>
             <a:r>
-              <a:rPr lang="en-US" smtClean="0"/>
+              <a:rPr lang="en-US"/>
               <a:t>Click to edit Master text styles</a:t>
             </a:r>
           </a:p>
           <a:p>
             <a:pPr lvl="1"/>
             <a:r>
-              <a:rPr lang="en-US" smtClean="0"/>
+              <a:rPr lang="en-US"/>
               <a:t>Second level</a:t>
             </a:r>
           </a:p>
           <a:p>
             <a:pPr lvl="2"/>
             <a:r>
-              <a:rPr lang="en-US" smtClean="0"/>
+              <a:rPr lang="en-US"/>
               <a:t>Third level</a:t>
             </a:r>
           </a:p>
           <a:p>
             <a:pPr lvl="3"/>
             <a:r>
-              <a:rPr lang="en-US" smtClean="0"/>
+              <a:rPr lang="en-US"/>
               <a:t>Fourth level</a:t>
             </a:r>
           </a:p>
           <a:p>
             <a:pPr lvl="4"/>
             <a:r>
-              <a:rPr lang="en-US" smtClean="0"/>
+              <a:rPr lang="en-US"/>
               <a:t>Fifth level</a:t>
             </a:r>
-            <a:endParaRPr lang="en-US"/>
           </a:p>
         </p:txBody>
       </p:sp>
@@ -1301,38 +1306,37 @@
           <a:p>
             <a:pPr lvl="0"/>
             <a:r>
-              <a:rPr lang="en-US" smtClean="0"/>
+              <a:rPr lang="en-US"/>
               <a:t>Click to edit Master text styles</a:t>
             </a:r>
           </a:p>
           <a:p>
             <a:pPr lvl="1"/>
             <a:r>
-              <a:rPr lang="en-US" smtClean="0"/>
+              <a:rPr lang="en-US"/>
               <a:t>Second level</a:t>
             </a:r>
           </a:p>
           <a:p>
             <a:pPr lvl="2"/>
             <a:r>
-              <a:rPr lang="en-US" smtClean="0"/>
+              <a:rPr lang="en-US"/>
               <a:t>Third level</a:t>
             </a:r>
           </a:p>
           <a:p>
             <a:pPr lvl="3"/>
             <a:r>
-              <a:rPr lang="en-US" smtClean="0"/>
+              <a:rPr lang="en-US"/>
               <a:t>Fourth level</a:t>
             </a:r>
           </a:p>
           <a:p>
             <a:pPr lvl="4"/>
             <a:r>
-              <a:rPr lang="en-US" smtClean="0"/>
+              <a:rPr lang="en-US"/>
               <a:t>Fifth level</a:t>
             </a:r>
-            <a:endParaRPr lang="en-US"/>
           </a:p>
         </p:txBody>
       </p:sp>
@@ -1353,7 +1357,7 @@
           <a:p>
             <a:fld id="{5BCAD085-E8A6-8845-BD4E-CB4CCA059FC4}" type="datetimeFigureOut">
               <a:rPr lang="en-US" smtClean="0"/>
-              <a:t>1/27/13</a:t>
+              <a:t>9/9/26</a:t>
             </a:fld>
             <a:endParaRPr lang="en-US"/>
           </a:p>
@@ -1451,10 +1455,9 @@
           </a:lstStyle>
           <a:p>
             <a:r>
-              <a:rPr lang="en-US" smtClean="0"/>
+              <a:rPr lang="en-US"/>
               <a:t>Click to edit Master title style</a:t>
             </a:r>
-            <a:endParaRPr lang="en-US"/>
           </a:p>
         </p:txBody>
       </p:sp>
@@ -1517,7 +1520,7 @@
           <a:p>
             <a:pPr lvl="0"/>
             <a:r>
-              <a:rPr lang="en-US" smtClean="0"/>
+              <a:rPr lang="en-US"/>
               <a:t>Click to edit Master text styles</a:t>
             </a:r>
           </a:p>
@@ -1573,38 +1576,37 @@
           <a:p>
             <a:pPr lvl="0"/>
             <a:r>
-              <a:rPr lang="en-US" smtClean="0"/>
+              <a:rPr lang="en-US"/>
               <a:t>Click to edit Master text styles</a:t>
             </a:r>
           </a:p>
           <a:p>
             <a:pPr lvl="1"/>
             <a:r>
-              <a:rPr lang="en-US" smtClean="0"/>
+              <a:rPr lang="en-US"/>
               <a:t>Second level</a:t>
             </a:r>
           </a:p>
           <a:p>
             <a:pPr lvl="2"/>
             <a:r>
-              <a:rPr lang="en-US" smtClean="0"/>
+              <a:rPr lang="en-US"/>
               <a:t>Third level</a:t>
             </a:r>
           </a:p>
           <a:p>
             <a:pPr lvl="3"/>
             <a:r>
-              <a:rPr lang="en-US" smtClean="0"/>
+              <a:rPr lang="en-US"/>
               <a:t>Fourth level</a:t>
             </a:r>
           </a:p>
           <a:p>
             <a:pPr lvl="4"/>
             <a:r>
-              <a:rPr lang="en-US" smtClean="0"/>
+              <a:rPr lang="en-US"/>
               <a:t>Fifth level</a:t>
             </a:r>
-            <a:endParaRPr lang="en-US"/>
           </a:p>
         </p:txBody>
       </p:sp>
@@ -1667,7 +1669,7 @@
           <a:p>
             <a:pPr lvl="0"/>
             <a:r>
-              <a:rPr lang="en-US" smtClean="0"/>
+              <a:rPr lang="en-US"/>
               <a:t>Click to edit Master text styles</a:t>
             </a:r>
           </a:p>
@@ -1723,38 +1725,37 @@
           <a:p>
             <a:pPr lvl="0"/>
             <a:r>
-              <a:rPr lang="en-US" smtClean="0"/>
+              <a:rPr lang="en-US"/>
               <a:t>Click to edit Master text styles</a:t>
             </a:r>
           </a:p>
           <a:p>
             <a:pPr lvl="1"/>
             <a:r>
-              <a:rPr lang="en-US" smtClean="0"/>
+              <a:rPr lang="en-US"/>
               <a:t>Second level</a:t>
             </a:r>
           </a:p>
           <a:p>
             <a:pPr lvl="2"/>
             <a:r>
-              <a:rPr lang="en-US" smtClean="0"/>
+              <a:rPr lang="en-US"/>
               <a:t>Third level</a:t>
             </a:r>
           </a:p>
           <a:p>
             <a:pPr lvl="3"/>
             <a:r>
-              <a:rPr lang="en-US" smtClean="0"/>
+              <a:rPr lang="en-US"/>
               <a:t>Fourth level</a:t>
             </a:r>
           </a:p>
           <a:p>
             <a:pPr lvl="4"/>
             <a:r>
-              <a:rPr lang="en-US" smtClean="0"/>
+              <a:rPr lang="en-US"/>
               <a:t>Fifth level</a:t>
             </a:r>
-            <a:endParaRPr lang="en-US"/>
           </a:p>
         </p:txBody>
       </p:sp>
@@ -1775,7 +1776,7 @@
           <a:p>
             <a:fld id="{5BCAD085-E8A6-8845-BD4E-CB4CCA059FC4}" type="datetimeFigureOut">
               <a:rPr lang="en-US" smtClean="0"/>
-              <a:t>1/27/13</a:t>
+              <a:t>9/9/26</a:t>
             </a:fld>
             <a:endParaRPr lang="en-US"/>
           </a:p>
@@ -1869,10 +1870,9 @@
           <a:lstStyle/>
           <a:p>
             <a:r>
-              <a:rPr lang="en-US" smtClean="0"/>
+              <a:rPr lang="en-US"/>
               <a:t>Click to edit Master title style</a:t>
             </a:r>
-            <a:endParaRPr lang="en-US"/>
           </a:p>
         </p:txBody>
       </p:sp>
@@ -1893,7 +1893,7 @@
           <a:p>
             <a:fld id="{5BCAD085-E8A6-8845-BD4E-CB4CCA059FC4}" type="datetimeFigureOut">
               <a:rPr lang="en-US" smtClean="0"/>
-              <a:t>1/27/13</a:t>
+              <a:t>9/9/26</a:t>
             </a:fld>
             <a:endParaRPr lang="en-US"/>
           </a:p>
@@ -1988,7 +1988,7 @@
           <a:p>
             <a:fld id="{5BCAD085-E8A6-8845-BD4E-CB4CCA059FC4}" type="datetimeFigureOut">
               <a:rPr lang="en-US" smtClean="0"/>
-              <a:t>1/27/13</a:t>
+              <a:t>9/9/26</a:t>
             </a:fld>
             <a:endParaRPr lang="en-US"/>
           </a:p>
@@ -2091,10 +2091,9 @@
           </a:lstStyle>
           <a:p>
             <a:r>
-              <a:rPr lang="en-US" smtClean="0"/>
+              <a:rPr lang="en-US"/>
               <a:t>Click to edit Master title style</a:t>
             </a:r>
-            <a:endParaRPr lang="en-US"/>
           </a:p>
         </p:txBody>
       </p:sp>
@@ -2148,38 +2147,37 @@
           <a:p>
             <a:pPr lvl="0"/>
             <a:r>
-              <a:rPr lang="en-US" smtClean="0"/>
+              <a:rPr lang="en-US"/>
               <a:t>Click to edit Master text styles</a:t>
             </a:r>
           </a:p>
           <a:p>
             <a:pPr lvl="1"/>
             <a:r>
-              <a:rPr lang="en-US" smtClean="0"/>
+              <a:rPr lang="en-US"/>
               <a:t>Second level</a:t>
             </a:r>
           </a:p>
           <a:p>
             <a:pPr lvl="2"/>
             <a:r>
-              <a:rPr lang="en-US" smtClean="0"/>
+              <a:rPr lang="en-US"/>
               <a:t>Third level</a:t>
             </a:r>
           </a:p>
           <a:p>
             <a:pPr lvl="3"/>
             <a:r>
-              <a:rPr lang="en-US" smtClean="0"/>
+              <a:rPr lang="en-US"/>
               <a:t>Fourth level</a:t>
             </a:r>
           </a:p>
           <a:p>
             <a:pPr lvl="4"/>
             <a:r>
-              <a:rPr lang="en-US" smtClean="0"/>
+              <a:rPr lang="en-US"/>
               <a:t>Fifth level</a:t>
             </a:r>
-            <a:endParaRPr lang="en-US"/>
           </a:p>
         </p:txBody>
       </p:sp>
@@ -2242,7 +2240,7 @@
           <a:p>
             <a:pPr lvl="0"/>
             <a:r>
-              <a:rPr lang="en-US" smtClean="0"/>
+              <a:rPr lang="en-US"/>
               <a:t>Click to edit Master text styles</a:t>
             </a:r>
           </a:p>
@@ -2265,7 +2263,7 @@
           <a:p>
             <a:fld id="{5BCAD085-E8A6-8845-BD4E-CB4CCA059FC4}" type="datetimeFigureOut">
               <a:rPr lang="en-US" smtClean="0"/>
-              <a:t>1/27/13</a:t>
+              <a:t>9/9/26</a:t>
             </a:fld>
             <a:endParaRPr lang="en-US"/>
           </a:p>
@@ -2368,10 +2366,9 @@
           </a:lstStyle>
           <a:p>
             <a:r>
-              <a:rPr lang="en-US" smtClean="0"/>
+              <a:rPr lang="en-US"/>
               <a:t>Click to edit Master title style</a:t>
             </a:r>
-            <a:endParaRPr lang="en-US"/>
           </a:p>
         </p:txBody>
       </p:sp>
@@ -2495,7 +2492,7 @@
           <a:p>
             <a:pPr lvl="0"/>
             <a:r>
-              <a:rPr lang="en-US" smtClean="0"/>
+              <a:rPr lang="en-US"/>
               <a:t>Click to edit Master text styles</a:t>
             </a:r>
           </a:p>
@@ -2518,7 +2515,7 @@
           <a:p>
             <a:fld id="{5BCAD085-E8A6-8845-BD4E-CB4CCA059FC4}" type="datetimeFigureOut">
               <a:rPr lang="en-US" smtClean="0"/>
-              <a:t>1/27/13</a:t>
+              <a:t>9/9/26</a:t>
             </a:fld>
             <a:endParaRPr lang="en-US"/>
           </a:p>
@@ -2627,10 +2624,9 @@
           <a:lstStyle/>
           <a:p>
             <a:r>
-              <a:rPr lang="en-US" smtClean="0"/>
+              <a:rPr lang="en-US"/>
               <a:t>Click to edit Master title style</a:t>
             </a:r>
-            <a:endParaRPr lang="en-US"/>
           </a:p>
         </p:txBody>
       </p:sp>
@@ -2661,38 +2657,37 @@
           <a:p>
             <a:pPr lvl="0"/>
             <a:r>
-              <a:rPr lang="en-US" smtClean="0"/>
+              <a:rPr lang="en-US"/>
               <a:t>Click to edit Master text styles</a:t>
             </a:r>
           </a:p>
           <a:p>
             <a:pPr lvl="1"/>
             <a:r>
-              <a:rPr lang="en-US" smtClean="0"/>
+              <a:rPr lang="en-US"/>
               <a:t>Second level</a:t>
             </a:r>
           </a:p>
           <a:p>
             <a:pPr lvl="2"/>
             <a:r>
-              <a:rPr lang="en-US" smtClean="0"/>
+              <a:rPr lang="en-US"/>
               <a:t>Third level</a:t>
             </a:r>
           </a:p>
           <a:p>
             <a:pPr lvl="3"/>
             <a:r>
-              <a:rPr lang="en-US" smtClean="0"/>
+              <a:rPr lang="en-US"/>
               <a:t>Fourth level</a:t>
             </a:r>
           </a:p>
           <a:p>
             <a:pPr lvl="4"/>
             <a:r>
-              <a:rPr lang="en-US" smtClean="0"/>
+              <a:rPr lang="en-US"/>
               <a:t>Fifth level</a:t>
             </a:r>
-            <a:endParaRPr lang="en-US"/>
           </a:p>
         </p:txBody>
       </p:sp>
@@ -2731,7 +2726,7 @@
           <a:p>
             <a:fld id="{5BCAD085-E8A6-8845-BD4E-CB4CCA059FC4}" type="datetimeFigureOut">
               <a:rPr lang="en-US" smtClean="0"/>
-              <a:t>1/27/13</a:t>
+              <a:t>9/9/26</a:t>
             </a:fld>
             <a:endParaRPr lang="en-US"/>
           </a:p>
@@ -3090,7 +3085,7 @@
 </file>
 
 <file path=ppt/slides/slide1.xml><?xml version="1.0" encoding="utf-8"?>
-<p:sld xmlns:a="http://schemas.openxmlformats.org/drawingml/2006/main" xmlns:p="http://schemas.openxmlformats.org/presentationml/2006/main" xmlns:r="http://schemas.openxmlformats.org/officeDocument/2006/relationships">
+<p:sld xmlns:a="http://schemas.openxmlformats.org/drawingml/2006/main" xmlns:r="http://schemas.openxmlformats.org/officeDocument/2006/relationships" xmlns:p="http://schemas.openxmlformats.org/presentationml/2006/main">
   <p:cSld>
     <p:spTree>
       <p:nvGrpSpPr>
@@ -3098,7 +3093,14 @@
         <p:cNvGrpSpPr/>
         <p:nvPr/>
       </p:nvGrpSpPr>
-      <p:grpSpPr/>
+      <p:grpSpPr>
+        <a:xfrm>
+          <a:off x="0" y="0"/>
+          <a:ext cx="0" cy="0"/>
+          <a:chOff x="0" y="0"/>
+          <a:chExt cx="0" cy="0"/>
+        </a:xfrm>
+      </p:grpSpPr>
       <p:sp>
         <p:nvSpPr>
           <p:cNvPr id="2" name="Rectangle 1"/>
@@ -3139,6 +3141,7 @@
           <a:lstStyle/>
           <a:p>
             <a:pPr algn="ctr"/>
+            <a:endParaRPr/>
           </a:p>
         </p:txBody>
       </p:sp>
@@ -3423,7 +3426,7 @@
 </file>
 
 <file path=ppt/slides/slide10.xml><?xml version="1.0" encoding="utf-8"?>
-<p:sld xmlns:a="http://schemas.openxmlformats.org/drawingml/2006/main" xmlns:p="http://schemas.openxmlformats.org/presentationml/2006/main" xmlns:r="http://schemas.openxmlformats.org/officeDocument/2006/relationships">
+<p:sld xmlns:a="http://schemas.openxmlformats.org/drawingml/2006/main" xmlns:r="http://schemas.openxmlformats.org/officeDocument/2006/relationships" xmlns:p="http://schemas.openxmlformats.org/presentationml/2006/main">
   <p:cSld>
     <p:spTree>
       <p:nvGrpSpPr>
@@ -3431,7 +3434,14 @@
         <p:cNvGrpSpPr/>
         <p:nvPr/>
       </p:nvGrpSpPr>
-      <p:grpSpPr/>
+      <p:grpSpPr>
+        <a:xfrm>
+          <a:off x="0" y="0"/>
+          <a:ext cx="0" cy="0"/>
+          <a:chOff x="0" y="0"/>
+          <a:chExt cx="0" cy="0"/>
+        </a:xfrm>
+      </p:grpSpPr>
       <p:sp>
         <p:nvSpPr>
           <p:cNvPr id="2" name="Rectangle 1"/>
@@ -3472,6 +3482,7 @@
           <a:lstStyle/>
           <a:p>
             <a:pPr algn="ctr"/>
+            <a:endParaRPr/>
           </a:p>
         </p:txBody>
       </p:sp>
@@ -3560,6 +3571,7 @@
                 <a:latin typeface="Calibri"/>
               </a:defRPr>
             </a:pPr>
+            <a:endParaRPr/>
           </a:p>
         </p:txBody>
       </p:sp>
@@ -3582,9 +3594,27 @@
                 <a:tableStyleId>{5C22544A-7EE6-4342-B048-85BDC9FD1C3A}</a:tableStyleId>
               </a:tblPr>
               <a:tblGrid>
-                <a:gridCol w="3352800"/>
-                <a:gridCol w="3352800"/>
-                <a:gridCol w="3352800"/>
+                <a:gridCol w="3352800">
+                  <a:extLst>
+                    <a:ext uri="{9D8B030D-6E8A-4147-A177-3AD203B41FA5}">
+                      <a16:colId xmlns:a16="http://schemas.microsoft.com/office/drawing/2014/main" val="20000"/>
+                    </a:ext>
+                  </a:extLst>
+                </a:gridCol>
+                <a:gridCol w="3352800">
+                  <a:extLst>
+                    <a:ext uri="{9D8B030D-6E8A-4147-A177-3AD203B41FA5}">
+                      <a16:colId xmlns:a16="http://schemas.microsoft.com/office/drawing/2014/main" val="20001"/>
+                    </a:ext>
+                  </a:extLst>
+                </a:gridCol>
+                <a:gridCol w="3352800">
+                  <a:extLst>
+                    <a:ext uri="{9D8B030D-6E8A-4147-A177-3AD203B41FA5}">
+                      <a16:colId xmlns:a16="http://schemas.microsoft.com/office/drawing/2014/main" val="20002"/>
+                    </a:ext>
+                  </a:extLst>
+                </a:gridCol>
               </a:tblGrid>
               <a:tr h="365760">
                 <a:tc>
@@ -3659,6 +3689,11 @@
                     </a:solidFill>
                   </a:tcPr>
                 </a:tc>
+                <a:extLst>
+                  <a:ext uri="{0D108BD9-81ED-4DB2-BD59-A6C34878D82A}">
+                    <a16:rowId xmlns:a16="http://schemas.microsoft.com/office/drawing/2014/main" val="10000"/>
+                  </a:ext>
+                </a:extLst>
               </a:tr>
               <a:tr h="365760">
                 <a:tc>
@@ -3712,6 +3747,11 @@
                   </a:txBody>
                   <a:tcPr/>
                 </a:tc>
+                <a:extLst>
+                  <a:ext uri="{0D108BD9-81ED-4DB2-BD59-A6C34878D82A}">
+                    <a16:rowId xmlns:a16="http://schemas.microsoft.com/office/drawing/2014/main" val="10001"/>
+                  </a:ext>
+                </a:extLst>
               </a:tr>
               <a:tr h="365760">
                 <a:tc>
@@ -3777,6 +3817,11 @@
                     </a:solidFill>
                   </a:tcPr>
                 </a:tc>
+                <a:extLst>
+                  <a:ext uri="{0D108BD9-81ED-4DB2-BD59-A6C34878D82A}">
+                    <a16:rowId xmlns:a16="http://schemas.microsoft.com/office/drawing/2014/main" val="10002"/>
+                  </a:ext>
+                </a:extLst>
               </a:tr>
               <a:tr h="365760">
                 <a:tc>
@@ -3830,6 +3875,11 @@
                   </a:txBody>
                   <a:tcPr/>
                 </a:tc>
+                <a:extLst>
+                  <a:ext uri="{0D108BD9-81ED-4DB2-BD59-A6C34878D82A}">
+                    <a16:rowId xmlns:a16="http://schemas.microsoft.com/office/drawing/2014/main" val="10003"/>
+                  </a:ext>
+                </a:extLst>
               </a:tr>
               <a:tr h="365760">
                 <a:tc>
@@ -3895,6 +3945,11 @@
                     </a:solidFill>
                   </a:tcPr>
                 </a:tc>
+                <a:extLst>
+                  <a:ext uri="{0D108BD9-81ED-4DB2-BD59-A6C34878D82A}">
+                    <a16:rowId xmlns:a16="http://schemas.microsoft.com/office/drawing/2014/main" val="10004"/>
+                  </a:ext>
+                </a:extLst>
               </a:tr>
               <a:tr h="365760">
                 <a:tc>
@@ -3948,6 +4003,11 @@
                   </a:txBody>
                   <a:tcPr/>
                 </a:tc>
+                <a:extLst>
+                  <a:ext uri="{0D108BD9-81ED-4DB2-BD59-A6C34878D82A}">
+                    <a16:rowId xmlns:a16="http://schemas.microsoft.com/office/drawing/2014/main" val="10005"/>
+                  </a:ext>
+                </a:extLst>
               </a:tr>
               <a:tr h="365760">
                 <a:tc>
@@ -4013,6 +4073,11 @@
                     </a:solidFill>
                   </a:tcPr>
                 </a:tc>
+                <a:extLst>
+                  <a:ext uri="{0D108BD9-81ED-4DB2-BD59-A6C34878D82A}">
+                    <a16:rowId xmlns:a16="http://schemas.microsoft.com/office/drawing/2014/main" val="10006"/>
+                  </a:ext>
+                </a:extLst>
               </a:tr>
             </a:tbl>
           </a:graphicData>
@@ -4099,6 +4164,7 @@
                 <a:latin typeface="Calibri"/>
               </a:defRPr>
             </a:pPr>
+            <a:endParaRPr/>
           </a:p>
         </p:txBody>
       </p:sp>
@@ -4111,7 +4177,7 @@
 </file>
 
 <file path=ppt/slides/slide11.xml><?xml version="1.0" encoding="utf-8"?>
-<p:sld xmlns:a="http://schemas.openxmlformats.org/drawingml/2006/main" xmlns:p="http://schemas.openxmlformats.org/presentationml/2006/main" xmlns:r="http://schemas.openxmlformats.org/officeDocument/2006/relationships">
+<p:sld xmlns:a="http://schemas.openxmlformats.org/drawingml/2006/main" xmlns:r="http://schemas.openxmlformats.org/officeDocument/2006/relationships" xmlns:p="http://schemas.openxmlformats.org/presentationml/2006/main">
   <p:cSld>
     <p:spTree>
       <p:nvGrpSpPr>
@@ -4119,7 +4185,14 @@
         <p:cNvGrpSpPr/>
         <p:nvPr/>
       </p:nvGrpSpPr>
-      <p:grpSpPr/>
+      <p:grpSpPr>
+        <a:xfrm>
+          <a:off x="0" y="0"/>
+          <a:ext cx="0" cy="0"/>
+          <a:chOff x="0" y="0"/>
+          <a:chExt cx="0" cy="0"/>
+        </a:xfrm>
+      </p:grpSpPr>
       <p:sp>
         <p:nvSpPr>
           <p:cNvPr id="2" name="Rectangle 1"/>
@@ -4160,6 +4233,7 @@
           <a:lstStyle/>
           <a:p>
             <a:pPr algn="ctr"/>
+            <a:endParaRPr/>
           </a:p>
         </p:txBody>
       </p:sp>
@@ -4392,7 +4466,9 @@
             <a:spAutoFit/>
           </a:bodyPr>
           <a:lstStyle/>
-          <a:p/>
+          <a:p>
+            <a:endParaRPr/>
+          </a:p>
         </p:txBody>
       </p:sp>
       <p:sp>
@@ -4437,6 +4513,7 @@
           <a:lstStyle/>
           <a:p>
             <a:pPr algn="ctr"/>
+            <a:endParaRPr/>
           </a:p>
         </p:txBody>
       </p:sp>
@@ -4569,6 +4646,7 @@
           <a:lstStyle/>
           <a:p>
             <a:pPr algn="ctr"/>
+            <a:endParaRPr/>
           </a:p>
         </p:txBody>
       </p:sp>
@@ -4701,6 +4779,7 @@
           <a:lstStyle/>
           <a:p>
             <a:pPr algn="ctr"/>
+            <a:endParaRPr/>
           </a:p>
         </p:txBody>
       </p:sp>
@@ -4784,7 +4863,7 @@
 </file>
 
 <file path=ppt/slides/slide12.xml><?xml version="1.0" encoding="utf-8"?>
-<p:sld xmlns:a="http://schemas.openxmlformats.org/drawingml/2006/main" xmlns:p="http://schemas.openxmlformats.org/presentationml/2006/main" xmlns:r="http://schemas.openxmlformats.org/officeDocument/2006/relationships">
+<p:sld xmlns:a="http://schemas.openxmlformats.org/drawingml/2006/main" xmlns:r="http://schemas.openxmlformats.org/officeDocument/2006/relationships" xmlns:p="http://schemas.openxmlformats.org/presentationml/2006/main">
   <p:cSld>
     <p:spTree>
       <p:nvGrpSpPr>
@@ -4792,7 +4871,14 @@
         <p:cNvGrpSpPr/>
         <p:nvPr/>
       </p:nvGrpSpPr>
-      <p:grpSpPr/>
+      <p:grpSpPr>
+        <a:xfrm>
+          <a:off x="0" y="0"/>
+          <a:ext cx="0" cy="0"/>
+          <a:chOff x="0" y="0"/>
+          <a:chExt cx="0" cy="0"/>
+        </a:xfrm>
+      </p:grpSpPr>
       <p:sp>
         <p:nvSpPr>
           <p:cNvPr id="2" name="Rectangle 1"/>
@@ -4833,6 +4919,7 @@
           <a:lstStyle/>
           <a:p>
             <a:pPr algn="ctr"/>
+            <a:endParaRPr/>
           </a:p>
         </p:txBody>
       </p:sp>
@@ -5014,6 +5101,7 @@
           <a:lstStyle/>
           <a:p>
             <a:pPr algn="ctr"/>
+            <a:endParaRPr/>
           </a:p>
         </p:txBody>
       </p:sp>
@@ -5165,7 +5253,7 @@
 </file>
 
 <file path=ppt/slides/slide2.xml><?xml version="1.0" encoding="utf-8"?>
-<p:sld xmlns:a="http://schemas.openxmlformats.org/drawingml/2006/main" xmlns:p="http://schemas.openxmlformats.org/presentationml/2006/main" xmlns:r="http://schemas.openxmlformats.org/officeDocument/2006/relationships">
+<p:sld xmlns:a="http://schemas.openxmlformats.org/drawingml/2006/main" xmlns:r="http://schemas.openxmlformats.org/officeDocument/2006/relationships" xmlns:p="http://schemas.openxmlformats.org/presentationml/2006/main">
   <p:cSld>
     <p:spTree>
       <p:nvGrpSpPr>
@@ -5173,7 +5261,14 @@
         <p:cNvGrpSpPr/>
         <p:nvPr/>
       </p:nvGrpSpPr>
-      <p:grpSpPr/>
+      <p:grpSpPr>
+        <a:xfrm>
+          <a:off x="0" y="0"/>
+          <a:ext cx="0" cy="0"/>
+          <a:chOff x="0" y="0"/>
+          <a:chExt cx="0" cy="0"/>
+        </a:xfrm>
+      </p:grpSpPr>
       <p:sp>
         <p:nvSpPr>
           <p:cNvPr id="2" name="Rectangle 1"/>
@@ -5214,6 +5309,7 @@
           <a:lstStyle/>
           <a:p>
             <a:pPr algn="ctr"/>
+            <a:endParaRPr/>
           </a:p>
         </p:txBody>
       </p:sp>
@@ -5401,7 +5497,7 @@
         </p:nvSpPr>
         <p:spPr>
           <a:xfrm>
-            <a:off x="548640" y="2743200"/>
+            <a:off x="548640" y="2948940"/>
             <a:ext cx="5303520" cy="960120"/>
           </a:xfrm>
           <a:prstGeom prst="roundRect">
@@ -5435,6 +5531,7 @@
           <a:lstStyle/>
           <a:p>
             <a:pPr algn="ctr"/>
+            <a:endParaRPr/>
           </a:p>
         </p:txBody>
       </p:sp>
@@ -5446,7 +5543,7 @@
         </p:nvSpPr>
         <p:spPr>
           <a:xfrm>
-            <a:off x="731520" y="2834640"/>
+            <a:off x="731520" y="3040380"/>
             <a:ext cx="4937760" cy="777240"/>
           </a:xfrm>
           <a:prstGeom prst="rect">
@@ -5517,7 +5614,7 @@
         </p:nvSpPr>
         <p:spPr>
           <a:xfrm>
-            <a:off x="6217920" y="2743200"/>
+            <a:off x="6156960" y="2948940"/>
             <a:ext cx="5303520" cy="960120"/>
           </a:xfrm>
           <a:prstGeom prst="roundRect">
@@ -5551,6 +5648,7 @@
           <a:lstStyle/>
           <a:p>
             <a:pPr algn="ctr"/>
+            <a:endParaRPr/>
           </a:p>
         </p:txBody>
       </p:sp>
@@ -5562,7 +5660,7 @@
         </p:nvSpPr>
         <p:spPr>
           <a:xfrm>
-            <a:off x="6400800" y="2834640"/>
+            <a:off x="6339840" y="3040380"/>
             <a:ext cx="4937760" cy="777240"/>
           </a:xfrm>
           <a:prstGeom prst="rect">
@@ -5634,7 +5732,7 @@
 </file>
 
 <file path=ppt/slides/slide3.xml><?xml version="1.0" encoding="utf-8"?>
-<p:sld xmlns:a="http://schemas.openxmlformats.org/drawingml/2006/main" xmlns:p="http://schemas.openxmlformats.org/presentationml/2006/main" xmlns:r="http://schemas.openxmlformats.org/officeDocument/2006/relationships">
+<p:sld xmlns:a="http://schemas.openxmlformats.org/drawingml/2006/main" xmlns:r="http://schemas.openxmlformats.org/officeDocument/2006/relationships" xmlns:p="http://schemas.openxmlformats.org/presentationml/2006/main">
   <p:cSld>
     <p:spTree>
       <p:nvGrpSpPr>
@@ -5642,7 +5740,14 @@
         <p:cNvGrpSpPr/>
         <p:nvPr/>
       </p:nvGrpSpPr>
-      <p:grpSpPr/>
+      <p:grpSpPr>
+        <a:xfrm>
+          <a:off x="0" y="0"/>
+          <a:ext cx="0" cy="0"/>
+          <a:chOff x="0" y="0"/>
+          <a:chExt cx="0" cy="0"/>
+        </a:xfrm>
+      </p:grpSpPr>
       <p:sp>
         <p:nvSpPr>
           <p:cNvPr id="2" name="Rectangle 1"/>
@@ -5683,6 +5788,7 @@
           <a:lstStyle/>
           <a:p>
             <a:pPr algn="ctr"/>
+            <a:endParaRPr/>
           </a:p>
         </p:txBody>
       </p:sp>
@@ -5771,6 +5877,7 @@
                 <a:latin typeface="Calibri"/>
               </a:defRPr>
             </a:pPr>
+            <a:endParaRPr/>
           </a:p>
         </p:txBody>
       </p:sp>
@@ -5793,8 +5900,20 @@
                 <a:tableStyleId>{5C22544A-7EE6-4342-B048-85BDC9FD1C3A}</a:tableStyleId>
               </a:tblPr>
               <a:tblGrid>
-                <a:gridCol w="5029200"/>
-                <a:gridCol w="5029200"/>
+                <a:gridCol w="5029200">
+                  <a:extLst>
+                    <a:ext uri="{9D8B030D-6E8A-4147-A177-3AD203B41FA5}">
+                      <a16:colId xmlns:a16="http://schemas.microsoft.com/office/drawing/2014/main" val="20000"/>
+                    </a:ext>
+                  </a:extLst>
+                </a:gridCol>
+                <a:gridCol w="5029200">
+                  <a:extLst>
+                    <a:ext uri="{9D8B030D-6E8A-4147-A177-3AD203B41FA5}">
+                      <a16:colId xmlns:a16="http://schemas.microsoft.com/office/drawing/2014/main" val="20001"/>
+                    </a:ext>
+                  </a:extLst>
+                </a:gridCol>
               </a:tblGrid>
               <a:tr h="365760">
                 <a:tc>
@@ -5845,6 +5964,11 @@
                     </a:solidFill>
                   </a:tcPr>
                 </a:tc>
+                <a:extLst>
+                  <a:ext uri="{0D108BD9-81ED-4DB2-BD59-A6C34878D82A}">
+                    <a16:rowId xmlns:a16="http://schemas.microsoft.com/office/drawing/2014/main" val="10000"/>
+                  </a:ext>
+                </a:extLst>
               </a:tr>
               <a:tr h="365760">
                 <a:tc>
@@ -5881,6 +6005,11 @@
                   </a:txBody>
                   <a:tcPr/>
                 </a:tc>
+                <a:extLst>
+                  <a:ext uri="{0D108BD9-81ED-4DB2-BD59-A6C34878D82A}">
+                    <a16:rowId xmlns:a16="http://schemas.microsoft.com/office/drawing/2014/main" val="10001"/>
+                  </a:ext>
+                </a:extLst>
               </a:tr>
               <a:tr h="365760">
                 <a:tc>
@@ -5925,6 +6054,11 @@
                     </a:solidFill>
                   </a:tcPr>
                 </a:tc>
+                <a:extLst>
+                  <a:ext uri="{0D108BD9-81ED-4DB2-BD59-A6C34878D82A}">
+                    <a16:rowId xmlns:a16="http://schemas.microsoft.com/office/drawing/2014/main" val="10002"/>
+                  </a:ext>
+                </a:extLst>
               </a:tr>
               <a:tr h="365760">
                 <a:tc>
@@ -5961,6 +6095,11 @@
                   </a:txBody>
                   <a:tcPr/>
                 </a:tc>
+                <a:extLst>
+                  <a:ext uri="{0D108BD9-81ED-4DB2-BD59-A6C34878D82A}">
+                    <a16:rowId xmlns:a16="http://schemas.microsoft.com/office/drawing/2014/main" val="10003"/>
+                  </a:ext>
+                </a:extLst>
               </a:tr>
             </a:tbl>
           </a:graphicData>
@@ -6063,6 +6202,7 @@
                 <a:latin typeface="Calibri"/>
               </a:defRPr>
             </a:pPr>
+            <a:endParaRPr/>
           </a:p>
           <a:p>
             <a:pPr>
@@ -6124,6 +6264,7 @@
                 <a:latin typeface="Calibri"/>
               </a:defRPr>
             </a:pPr>
+            <a:endParaRPr/>
           </a:p>
         </p:txBody>
       </p:sp>
@@ -6136,7 +6277,7 @@
 </file>
 
 <file path=ppt/slides/slide4.xml><?xml version="1.0" encoding="utf-8"?>
-<p:sld xmlns:a="http://schemas.openxmlformats.org/drawingml/2006/main" xmlns:p="http://schemas.openxmlformats.org/presentationml/2006/main" xmlns:r="http://schemas.openxmlformats.org/officeDocument/2006/relationships">
+<p:sld xmlns:a="http://schemas.openxmlformats.org/drawingml/2006/main" xmlns:r="http://schemas.openxmlformats.org/officeDocument/2006/relationships" xmlns:p="http://schemas.openxmlformats.org/presentationml/2006/main">
   <p:cSld>
     <p:spTree>
       <p:nvGrpSpPr>
@@ -6144,7 +6285,14 @@
         <p:cNvGrpSpPr/>
         <p:nvPr/>
       </p:nvGrpSpPr>
-      <p:grpSpPr/>
+      <p:grpSpPr>
+        <a:xfrm>
+          <a:off x="0" y="0"/>
+          <a:ext cx="0" cy="0"/>
+          <a:chOff x="0" y="0"/>
+          <a:chExt cx="0" cy="0"/>
+        </a:xfrm>
+      </p:grpSpPr>
       <p:sp>
         <p:nvSpPr>
           <p:cNvPr id="2" name="Rectangle 1"/>
@@ -6185,6 +6333,7 @@
           <a:lstStyle/>
           <a:p>
             <a:pPr algn="ctr"/>
+            <a:endParaRPr/>
           </a:p>
         </p:txBody>
       </p:sp>
@@ -6318,6 +6467,7 @@
           <a:lstStyle/>
           <a:p>
             <a:pPr algn="ctr"/>
+            <a:endParaRPr/>
           </a:p>
         </p:txBody>
       </p:sp>
@@ -6517,7 +6667,7 @@
 </file>
 
 <file path=ppt/slides/slide5.xml><?xml version="1.0" encoding="utf-8"?>
-<p:sld xmlns:a="http://schemas.openxmlformats.org/drawingml/2006/main" xmlns:p="http://schemas.openxmlformats.org/presentationml/2006/main" xmlns:r="http://schemas.openxmlformats.org/officeDocument/2006/relationships">
+<p:sld xmlns:a="http://schemas.openxmlformats.org/drawingml/2006/main" xmlns:r="http://schemas.openxmlformats.org/officeDocument/2006/relationships" xmlns:p="http://schemas.openxmlformats.org/presentationml/2006/main">
   <p:cSld>
     <p:spTree>
       <p:nvGrpSpPr>
@@ -6525,7 +6675,14 @@
         <p:cNvGrpSpPr/>
         <p:nvPr/>
       </p:nvGrpSpPr>
-      <p:grpSpPr/>
+      <p:grpSpPr>
+        <a:xfrm>
+          <a:off x="0" y="0"/>
+          <a:ext cx="0" cy="0"/>
+          <a:chOff x="0" y="0"/>
+          <a:chExt cx="0" cy="0"/>
+        </a:xfrm>
+      </p:grpSpPr>
       <p:sp>
         <p:nvSpPr>
           <p:cNvPr id="2" name="Rectangle 1"/>
@@ -6566,6 +6723,7 @@
           <a:lstStyle/>
           <a:p>
             <a:pPr algn="ctr"/>
+            <a:endParaRPr/>
           </a:p>
         </p:txBody>
       </p:sp>
@@ -6683,6 +6841,7 @@
           <a:lstStyle/>
           <a:p>
             <a:pPr algn="ctr"/>
+            <a:endParaRPr/>
           </a:p>
         </p:txBody>
       </p:sp>
@@ -6898,7 +7057,7 @@
 </file>
 
 <file path=ppt/slides/slide6.xml><?xml version="1.0" encoding="utf-8"?>
-<p:sld xmlns:a="http://schemas.openxmlformats.org/drawingml/2006/main" xmlns:p="http://schemas.openxmlformats.org/presentationml/2006/main" xmlns:r="http://schemas.openxmlformats.org/officeDocument/2006/relationships">
+<p:sld xmlns:a="http://schemas.openxmlformats.org/drawingml/2006/main" xmlns:r="http://schemas.openxmlformats.org/officeDocument/2006/relationships" xmlns:p="http://schemas.openxmlformats.org/presentationml/2006/main">
   <p:cSld>
     <p:spTree>
       <p:nvGrpSpPr>
@@ -6906,7 +7065,14 @@
         <p:cNvGrpSpPr/>
         <p:nvPr/>
       </p:nvGrpSpPr>
-      <p:grpSpPr/>
+      <p:grpSpPr>
+        <a:xfrm>
+          <a:off x="0" y="0"/>
+          <a:ext cx="0" cy="0"/>
+          <a:chOff x="0" y="0"/>
+          <a:chExt cx="0" cy="0"/>
+        </a:xfrm>
+      </p:grpSpPr>
       <p:sp>
         <p:nvSpPr>
           <p:cNvPr id="2" name="Rectangle 1"/>
@@ -6947,6 +7113,7 @@
           <a:lstStyle/>
           <a:p>
             <a:pPr algn="ctr"/>
+            <a:endParaRPr/>
           </a:p>
         </p:txBody>
       </p:sp>
@@ -7030,7 +7197,7 @@
         </p:nvSpPr>
         <p:spPr>
           <a:xfrm>
-            <a:off x="548640" y="1645920"/>
+            <a:off x="548640" y="1737360"/>
             <a:ext cx="5669280" cy="1417320"/>
           </a:xfrm>
           <a:prstGeom prst="roundRect">
@@ -7064,6 +7231,7 @@
           <a:lstStyle/>
           <a:p>
             <a:pPr algn="ctr"/>
+            <a:endParaRPr/>
           </a:p>
         </p:txBody>
       </p:sp>
@@ -7075,7 +7243,7 @@
         </p:nvSpPr>
         <p:spPr>
           <a:xfrm>
-            <a:off x="731520" y="1737360"/>
+            <a:off x="731520" y="1828800"/>
             <a:ext cx="5303520" cy="1234440"/>
           </a:xfrm>
           <a:prstGeom prst="rect">
@@ -7311,7 +7479,7 @@
 </file>
 
 <file path=ppt/slides/slide7.xml><?xml version="1.0" encoding="utf-8"?>
-<p:sld xmlns:a="http://schemas.openxmlformats.org/drawingml/2006/main" xmlns:p="http://schemas.openxmlformats.org/presentationml/2006/main" xmlns:r="http://schemas.openxmlformats.org/officeDocument/2006/relationships">
+<p:sld xmlns:a="http://schemas.openxmlformats.org/drawingml/2006/main" xmlns:r="http://schemas.openxmlformats.org/officeDocument/2006/relationships" xmlns:p="http://schemas.openxmlformats.org/presentationml/2006/main">
   <p:cSld>
     <p:spTree>
       <p:nvGrpSpPr>
@@ -7319,7 +7487,14 @@
         <p:cNvGrpSpPr/>
         <p:nvPr/>
       </p:nvGrpSpPr>
-      <p:grpSpPr/>
+      <p:grpSpPr>
+        <a:xfrm>
+          <a:off x="0" y="0"/>
+          <a:ext cx="0" cy="0"/>
+          <a:chOff x="0" y="0"/>
+          <a:chExt cx="0" cy="0"/>
+        </a:xfrm>
+      </p:grpSpPr>
       <p:sp>
         <p:nvSpPr>
           <p:cNvPr id="2" name="Rectangle 1"/>
@@ -7360,6 +7535,7 @@
           <a:lstStyle/>
           <a:p>
             <a:pPr algn="ctr"/>
+            <a:endParaRPr/>
           </a:p>
         </p:txBody>
       </p:sp>
@@ -7583,7 +7759,7 @@
         </p:nvSpPr>
         <p:spPr>
           <a:xfrm>
-            <a:off x="548640" y="3017520"/>
+            <a:off x="548640" y="3187640"/>
             <a:ext cx="5303520" cy="731520"/>
           </a:xfrm>
           <a:prstGeom prst="roundRect">
@@ -7617,6 +7793,7 @@
           <a:lstStyle/>
           <a:p>
             <a:pPr algn="ctr"/>
+            <a:endParaRPr/>
           </a:p>
         </p:txBody>
       </p:sp>
@@ -7628,7 +7805,7 @@
         </p:nvSpPr>
         <p:spPr>
           <a:xfrm>
-            <a:off x="731520" y="3108960"/>
+            <a:off x="731520" y="3279080"/>
             <a:ext cx="4937760" cy="548640"/>
           </a:xfrm>
           <a:prstGeom prst="rect">
@@ -7667,7 +7844,7 @@
         </p:nvSpPr>
         <p:spPr>
           <a:xfrm>
-            <a:off x="6217920" y="3017520"/>
+            <a:off x="6217920" y="3187640"/>
             <a:ext cx="5303520" cy="731520"/>
           </a:xfrm>
           <a:prstGeom prst="roundRect">
@@ -7701,6 +7878,7 @@
           <a:lstStyle/>
           <a:p>
             <a:pPr algn="ctr"/>
+            <a:endParaRPr/>
           </a:p>
         </p:txBody>
       </p:sp>
@@ -7712,7 +7890,7 @@
         </p:nvSpPr>
         <p:spPr>
           <a:xfrm>
-            <a:off x="6400800" y="3108960"/>
+            <a:off x="6400800" y="3279080"/>
             <a:ext cx="4937760" cy="548640"/>
           </a:xfrm>
           <a:prstGeom prst="rect">
@@ -7751,7 +7929,7 @@
         </p:nvSpPr>
         <p:spPr>
           <a:xfrm>
-            <a:off x="548640" y="3886200"/>
+            <a:off x="548640" y="4056320"/>
             <a:ext cx="10972800" cy="731520"/>
           </a:xfrm>
           <a:prstGeom prst="roundRect">
@@ -7785,6 +7963,7 @@
           <a:lstStyle/>
           <a:p>
             <a:pPr algn="ctr"/>
+            <a:endParaRPr/>
           </a:p>
         </p:txBody>
       </p:sp>
@@ -7796,7 +7975,7 @@
         </p:nvSpPr>
         <p:spPr>
           <a:xfrm>
-            <a:off x="731520" y="3977640"/>
+            <a:off x="731520" y="4147760"/>
             <a:ext cx="10607040" cy="548640"/>
           </a:xfrm>
           <a:prstGeom prst="rect">
@@ -7836,7 +8015,7 @@
 </file>
 
 <file path=ppt/slides/slide8.xml><?xml version="1.0" encoding="utf-8"?>
-<p:sld xmlns:a="http://schemas.openxmlformats.org/drawingml/2006/main" xmlns:p="http://schemas.openxmlformats.org/presentationml/2006/main" xmlns:r="http://schemas.openxmlformats.org/officeDocument/2006/relationships">
+<p:sld xmlns:a="http://schemas.openxmlformats.org/drawingml/2006/main" xmlns:r="http://schemas.openxmlformats.org/officeDocument/2006/relationships" xmlns:p="http://schemas.openxmlformats.org/presentationml/2006/main">
   <p:cSld>
     <p:spTree>
       <p:nvGrpSpPr>
@@ -7844,7 +8023,14 @@
         <p:cNvGrpSpPr/>
         <p:nvPr/>
       </p:nvGrpSpPr>
-      <p:grpSpPr/>
+      <p:grpSpPr>
+        <a:xfrm>
+          <a:off x="0" y="0"/>
+          <a:ext cx="0" cy="0"/>
+          <a:chOff x="0" y="0"/>
+          <a:chExt cx="0" cy="0"/>
+        </a:xfrm>
+      </p:grpSpPr>
       <p:sp>
         <p:nvSpPr>
           <p:cNvPr id="2" name="Rectangle 1"/>
@@ -7885,6 +8071,7 @@
           <a:lstStyle/>
           <a:p>
             <a:pPr algn="ctr"/>
+            <a:endParaRPr/>
           </a:p>
         </p:txBody>
       </p:sp>
@@ -8065,7 +8252,9 @@
             <a:spAutoFit/>
           </a:bodyPr>
           <a:lstStyle/>
-          <a:p/>
+          <a:p>
+            <a:endParaRPr/>
+          </a:p>
         </p:txBody>
       </p:sp>
       <p:sp>
@@ -8110,6 +8299,7 @@
           <a:lstStyle/>
           <a:p>
             <a:pPr algn="ctr"/>
+            <a:endParaRPr/>
           </a:p>
         </p:txBody>
       </p:sp>
@@ -8193,7 +8383,7 @@
         <p:spPr>
           <a:xfrm>
             <a:off x="6217920" y="3017520"/>
-            <a:ext cx="5303520" cy="1188720"/>
+            <a:ext cx="5562954" cy="1222520"/>
           </a:xfrm>
           <a:prstGeom prst="roundRect">
             <a:avLst/>
@@ -8226,6 +8416,7 @@
           <a:lstStyle/>
           <a:p>
             <a:pPr algn="ctr"/>
+            <a:endParaRPr/>
           </a:p>
         </p:txBody>
       </p:sp>
@@ -8238,7 +8429,7 @@
         <p:spPr>
           <a:xfrm>
             <a:off x="6400800" y="3108960"/>
-            <a:ext cx="4937760" cy="1005840"/>
+            <a:ext cx="5242560" cy="1131079"/>
           </a:xfrm>
           <a:prstGeom prst="rect">
             <a:avLst/>
@@ -8263,7 +8454,12 @@
               </a:defRPr>
             </a:pPr>
             <a:r>
-              <a:t>arcade_drive(0.5, 0):     ✓ Straight forward at 50%</a:t>
+              <a:rPr dirty="0" err="1"/>
+              <a:t>arcade_drive</a:t>
+            </a:r>
+            <a:r>
+              <a:rPr dirty="0"/>
+              <a:t>(0.5, 0):     ✓ Straight forward at 50%</a:t>
             </a:r>
           </a:p>
           <a:p>
@@ -8279,7 +8475,12 @@
               </a:defRPr>
             </a:pPr>
             <a:r>
-              <a:t>arcade_drive(0.5, 0.3):   ✓ Forward + turn right</a:t>
+              <a:rPr dirty="0" err="1"/>
+              <a:t>arcade_drive</a:t>
+            </a:r>
+            <a:r>
+              <a:rPr dirty="0"/>
+              <a:t>(0.5, 0.3):   ✓ Forward + turn right</a:t>
             </a:r>
           </a:p>
           <a:p>
@@ -8295,7 +8496,12 @@
               </a:defRPr>
             </a:pPr>
             <a:r>
-              <a:t>arcade_drive(0, 0.5):     ✓ Spin right in place</a:t>
+              <a:rPr dirty="0" err="1"/>
+              <a:t>arcade_drive</a:t>
+            </a:r>
+            <a:r>
+              <a:rPr dirty="0"/>
+              <a:t>(0, 0.5):     ✓ Spin right in place</a:t>
             </a:r>
           </a:p>
           <a:p>
@@ -8311,7 +8517,12 @@
               </a:defRPr>
             </a:pPr>
             <a:r>
-              <a:t>arcade_drive(-0.5, 0.3):  ✓ Backward while turning right</a:t>
+              <a:rPr dirty="0" err="1"/>
+              <a:t>arcade_drive</a:t>
+            </a:r>
+            <a:r>
+              <a:rPr dirty="0"/>
+              <a:t>(-0.5, 0.3):  ✓ Backward while turning right</a:t>
             </a:r>
           </a:p>
         </p:txBody>
@@ -8325,7 +8536,7 @@
 </file>
 
 <file path=ppt/slides/slide9.xml><?xml version="1.0" encoding="utf-8"?>
-<p:sld xmlns:a="http://schemas.openxmlformats.org/drawingml/2006/main" xmlns:p="http://schemas.openxmlformats.org/presentationml/2006/main" xmlns:r="http://schemas.openxmlformats.org/officeDocument/2006/relationships">
+<p:sld xmlns:a="http://schemas.openxmlformats.org/drawingml/2006/main" xmlns:r="http://schemas.openxmlformats.org/officeDocument/2006/relationships" xmlns:p="http://schemas.openxmlformats.org/presentationml/2006/main">
   <p:cSld>
     <p:spTree>
       <p:nvGrpSpPr>
@@ -8333,7 +8544,14 @@
         <p:cNvGrpSpPr/>
         <p:nvPr/>
       </p:nvGrpSpPr>
-      <p:grpSpPr/>
+      <p:grpSpPr>
+        <a:xfrm>
+          <a:off x="0" y="0"/>
+          <a:ext cx="0" cy="0"/>
+          <a:chOff x="0" y="0"/>
+          <a:chExt cx="0" cy="0"/>
+        </a:xfrm>
+      </p:grpSpPr>
       <p:sp>
         <p:nvSpPr>
           <p:cNvPr id="2" name="Rectangle 1"/>
@@ -8374,6 +8592,7 @@
           <a:lstStyle/>
           <a:p>
             <a:pPr algn="ctr"/>
+            <a:endParaRPr/>
           </a:p>
         </p:txBody>
       </p:sp>
@@ -8542,7 +8761,9 @@
             <a:spAutoFit/>
           </a:bodyPr>
           <a:lstStyle/>
-          <a:p/>
+          <a:p>
+            <a:endParaRPr/>
+          </a:p>
         </p:txBody>
       </p:sp>
       <p:sp>
@@ -8587,6 +8808,7 @@
           <a:lstStyle/>
           <a:p>
             <a:pPr algn="ctr"/>
+            <a:endParaRPr/>
           </a:p>
         </p:txBody>
       </p:sp>
@@ -8703,6 +8925,7 @@
           <a:lstStyle/>
           <a:p>
             <a:pPr algn="ctr"/>
+            <a:endParaRPr/>
           </a:p>
         </p:txBody>
       </p:sp>
@@ -8819,6 +9042,7 @@
           <a:lstStyle/>
           <a:p>
             <a:pPr algn="ctr"/>
+            <a:endParaRPr/>
           </a:p>
         </p:txBody>
       </p:sp>
